--- a/assets/pptx/catalog-143.pptx
+++ b/assets/pptx/catalog-143.pptx
@@ -3304,7 +3304,7 @@
                 <a:ea typeface="Ebrima"/>
                 <a:cs typeface="Ebrima"/>
               </a:rPr>
-              <a:t>ያዘኝ ኃይልህን አልብሰኝ (2x)</a:t>
+              <a:t>ያዘኝ ኃይልህን አልብሰኝ 2x</a:t>
             </a:r>
           </a:p>
         </p:txBody>
@@ -3497,7 +3497,7 @@
                 <a:ea typeface="Ebrima"/>
                 <a:cs typeface="Ebrima"/>
               </a:rPr>
-              <a:t>ለም አድርገው የልቤን መሬት (2x)</a:t>
+              <a:t>ለም አድርገው የልቤን መሬት 2x</a:t>
             </a:r>
           </a:p>
         </p:txBody>
@@ -3739,7 +3739,7 @@
                 <a:ea typeface="Ebrima"/>
                 <a:cs typeface="Ebrima"/>
               </a:rPr>
-              <a:t>እከልላለሁ ገበናዬን (2x)</a:t>
+              <a:t>እከልላለሁ ገበናዬን 2x</a:t>
             </a:r>
           </a:p>
         </p:txBody>
@@ -3842,7 +3842,7 @@
                 <a:ea typeface="Ebrima"/>
                 <a:cs typeface="Ebrima"/>
               </a:rPr>
-              <a:t>ዓይንህ ዘልቆ ልብን ያያል (2x)</a:t>
+              <a:t>ዓይንህ ዘልቆ ልብን ያያል 2x</a:t>
             </a:r>
           </a:p>
         </p:txBody>
@@ -3981,7 +3981,7 @@
                 <a:ea typeface="Ebrima"/>
                 <a:cs typeface="Ebrima"/>
               </a:rPr>
-              <a:t>ዛሬማ ላፍታ እንኳ አቅም አጣሁ (2x)</a:t>
+              <a:t>ዛሬማ ላፍታ እንኳ አቅም አጣሁ 2x</a:t>
             </a:r>
           </a:p>
         </p:txBody>
@@ -4259,7 +4259,7 @@
                 <a:ea typeface="Ebrima"/>
                 <a:cs typeface="Ebrima"/>
               </a:rPr>
-              <a:t>ያዘኝ ኃይልህን አልብሰኝ (2x)</a:t>
+              <a:t>ያዘኝ ኃይልህን አልብሰኝ 2x</a:t>
             </a:r>
           </a:p>
         </p:txBody>
@@ -4344,7 +4344,7 @@
                 <a:ea typeface="Ebrima"/>
                 <a:cs typeface="Ebrima"/>
               </a:rPr>
-              <a:t>በልቤ የሚኖር ሁል ጊዜ የሚነድ (2x)</a:t>
+              <a:t>በልቤ የሚኖር ሁል ጊዜ የሚነድ 2x</a:t>
             </a:r>
           </a:p>
           <a:p>
